--- a/sunum/mcp-server-stratejisi.pptx
+++ b/sunum/mcp-server-stratejisi.pptx
@@ -927,7 +927,7 @@
           </a:p>
           <a:p>
             <a:r>
-              <a:t>  1) KODDA: mevcut servis metodunun üstüne @McpTool, parametrelere @McpToolParam.</a:t>
+              <a:t>  1) KODDA: mevcut servis metodunun üstüne @Tool, parametrelere @ToolParam — zaten süreç içi tool için kullandığımız anotasyonların aynısı; yayınlanacaklar ayrıca ZeusMcpTools.of(...) ile bildirilir.</a:t>
             </a:r>
           </a:p>
           <a:p>
@@ -1478,7 +1478,7 @@
           </a:p>
           <a:p>
             <a:r>
-              <a:t>bağlamıyoruz; araya zeus-ai'nin kendi arayüzü giriyor. Kütüphane arayüzü değişirse tek yerde</a:t>
+              <a:t>bağlamıyoruz; araya zeus-ai-mcp'nin kendi arayüzü giriyor. Kütüphane arayüzü değişirse tek yerde</a:t>
             </a:r>
           </a:p>
           <a:p>
@@ -1643,7 +1643,7 @@
           </a:p>
           <a:p>
             <a:r>
-              <a:t>"zeus-ai: kurumsal uygulamalarımızın yeteneklerini — yetkiyi kendi elimizde tutarak — asistana</a:t>
+              <a:t>"zeus-ai-mcp: kurumsal uygulamalarımızın yeteneklerini — yetkiyi kendi elimizde tutarak — asistana</a:t>
             </a:r>
           </a:p>
           <a:p>
@@ -8223,7 +8223,7 @@
                 </a:solidFill>
                 <a:latin typeface="Calibri"/>
               </a:rPr>
-              <a:t>NEDEN TEK PLATFORM (zeus-ai)</a:t>
+              <a:t>NEDEN TEK PLATFORM (zeus-ai-mcp)</a:t>
             </a:r>
           </a:p>
           <a:p>
@@ -8333,7 +8333,7 @@
                 </a:solidFill>
                 <a:latin typeface="Calibri"/>
               </a:rPr>
-              <a:t>zeus-ai — sürümü platform yönetir</a:t>
+              <a:t>zeus-ai-mcp — sürümü platform yönetir</a:t>
             </a:r>
           </a:p>
           <a:p>
@@ -8355,7 +8355,7 @@
                 </a:solidFill>
                 <a:latin typeface="Calibri"/>
               </a:rPr>
-              <a:t>2.  Servis metodunu işaretler</a:t>
+              <a:t>2.  İşaretler ve yayınlar</a:t>
             </a:r>
           </a:p>
           <a:p>
@@ -8377,7 +8377,7 @@
                 </a:solidFill>
                 <a:latin typeface="Consolas"/>
               </a:rPr>
-              <a:t>@McpTool("Başvuru durumunu sorgular")</a:t>
+              <a:t>@Tool("...") · ZeusMcpTools.of(araclar)</a:t>
             </a:r>
           </a:p>
           <a:p>
@@ -9863,7 +9863,7 @@
                 </a:solidFill>
                 <a:latin typeface="Calibri"/>
               </a:rPr>
-              <a:t>zeus-ai: kurumsal uygulamalarımızın yeteneklerini — yetkiyi kendi elimizde tutarak — asistana açan platform katmanı.</a:t>
+              <a:t>zeus-ai-mcp: kurumsal uygulamalarımızın yeteneklerini — yetkiyi kendi elimizde tutarak — asistana açan platform katmanı.</a:t>
             </a:r>
           </a:p>
         </p:txBody>
